--- a/downloads/sgl-template-light.pptx
+++ b/downloads/sgl-template-light.pptx
@@ -3780,7 +3780,7 @@
                 <a:ea typeface="Pretendard SemiBold" pitchFamily="34" charset="-122"/>
                 <a:cs typeface="Pretendard SemiBold" pitchFamily="34" charset="-120"/>
               </a:rPr>
-              <a:t>노이즈에서 형태로</a:t>
+              <a:t>보는 것에서 만드는 것으로</a:t>
             </a:r>
             <a:endParaRPr lang="ko-KR" sz="4600" dirty="0"/>
           </a:p>
@@ -10537,7 +10537,7 @@
                 <a:ea typeface="Pretendard SemiBold" pitchFamily="34" charset="-122"/>
                 <a:cs typeface="Pretendard SemiBold" pitchFamily="34" charset="-120"/>
               </a:rPr>
-              <a:t>노이즈에서 형태로</a:t>
+              <a:t>보는 것에서 만드는 것으로</a:t>
             </a:r>
             <a:endParaRPr lang="ko-KR" sz="4600" dirty="0"/>
           </a:p>

--- a/downloads/sgl-template-light.pptx
+++ b/downloads/sgl-template-light.pptx
@@ -7503,7 +7503,7 @@
                 <a:ea typeface="Pretendard" pitchFamily="34" charset="-122"/>
                 <a:cs typeface="Pretendard" pitchFamily="34" charset="-120"/>
               </a:rPr>
-              <a:t>웹</a:t>
+              <a:t>전화</a:t>
             </a:r>
             <a:endParaRPr lang="ko-KR" sz="1300" dirty="0"/>
           </a:p>
@@ -7562,7 +7562,7 @@
                 <a:ea typeface="Pretendard" pitchFamily="34" charset="-122"/>
                 <a:cs typeface="Pretendard" pitchFamily="34" charset="-120"/>
               </a:rPr>
-              <a:t>홈페이지 주소 자리</a:t>
+              <a:t>전화번호 자리</a:t>
             </a:r>
             <a:endParaRPr lang="ko-KR" sz="1300" dirty="0"/>
           </a:p>
@@ -7604,7 +7604,7 @@
                 <a:ea typeface="Pretendard" pitchFamily="34" charset="-122"/>
                 <a:cs typeface="Pretendard" pitchFamily="34" charset="-120"/>
               </a:rPr>
-              <a:t>연구실</a:t>
+              <a:t>웹</a:t>
             </a:r>
             <a:endParaRPr lang="ko-KR" sz="1300" dirty="0"/>
           </a:p>
@@ -7663,7 +7663,7 @@
                 <a:ea typeface="Pretendard" pitchFamily="34" charset="-122"/>
                 <a:cs typeface="Pretendard" pitchFamily="34" charset="-120"/>
               </a:rPr>
-              <a:t>동서대학교 · 건물·호수 자리</a:t>
+              <a:t>홈페이지 주소 자리</a:t>
             </a:r>
             <a:endParaRPr lang="ko-KR" sz="1300" dirty="0"/>
           </a:p>
@@ -11181,7 +11181,7 @@
                 <a:ea typeface="Pretendard" pitchFamily="34" charset="-122"/>
                 <a:cs typeface="Pretendard" pitchFamily="34" charset="-120"/>
               </a:rPr>
-              <a:t>홈페이지 주소 자리</a:t>
+              <a:t>전화번호 자리</a:t>
             </a:r>
             <a:endParaRPr lang="ko-KR" sz="1300" dirty="0"/>
           </a:p>
@@ -11225,7 +11225,7 @@
                 <a:ea typeface="Pretendard" pitchFamily="34" charset="-122"/>
                 <a:cs typeface="Pretendard" pitchFamily="34" charset="-120"/>
               </a:rPr>
-              <a:t>동서대학교 · 건물·호수 자리</a:t>
+              <a:t>홈페이지 주소 자리</a:t>
             </a:r>
             <a:endParaRPr lang="ko-KR" sz="1300" dirty="0"/>
           </a:p>
